--- a/decks/hist-renaissance-medicine/hist-renaissance-medicine_ch2_causes-and-diagnosis.pptx
+++ b/decks/hist-renaissance-medicine/hist-renaissance-medicine_ch2_causes-and-diagnosis.pptx
@@ -127,30 +127,30 @@
   <p:extLst>
     <p:ext uri="{521415D9-36F7-43E2-AB2F-B90AF26B5E84}">
       <p14:sectionLst xmlns:p14="http://schemas.microsoft.com/office/powerpoint/2010/main">
-        <p14:section name="Opening" id="{74ace12d-5276-bd6e-7334-0725175fabc3}">
+        <p14:section name="Opening" id="{964725a4-d015-85bc-4833-cf5a922bf0ad}">
           <p14:sldIdLst>
             <p14:sldId id="256"/>
           </p14:sldIdLst>
         </p14:section>
-        <p14:section name="Gate" id="{35fc055c-dc0e-380c-830e-e6a74d8180c7}">
+        <p14:section name="Gate" id="{d7e9159e-4c9c-7964-0be5-7de4312b04a8}">
           <p14:sldIdLst>
             <p14:sldId id="257"/>
             <p14:sldId id="258"/>
             <p14:sldId id="259"/>
           </p14:sldIdLst>
         </p14:section>
-        <p14:section name="Pre-teach" id="{c44f6e36-4e03-2f77-2e62-3cc59d1771b7}">
+        <p14:section name="Pre-teach" id="{065c7b7c-6266-da49-5818-51346c2e8b28}">
           <p14:sldIdLst>
             <p14:sldId id="260"/>
           </p14:sldIdLst>
         </p14:section>
-        <p14:section name="Read-along" id="{cb0e2ce2-74a5-93f3-a841-3a30bafddcfc}">
+        <p14:section name="Read-along" id="{c8e07259-4a42-6596-7bef-e6e10563acd0}">
           <p14:sldIdLst>
             <p14:sldId id="261"/>
             <p14:sldId id="262"/>
           </p14:sldIdLst>
         </p14:section>
-        <p14:section name="Teach" id="{bb993ba8-3a1a-66dc-2b93-cdd8caf93461}">
+        <p14:section name="Teach" id="{11d905e6-8ef9-963c-b839-8f3553c55c75}">
           <p14:sldIdLst>
             <p14:sldId id="263"/>
             <p14:sldId id="264"/>
@@ -160,7 +160,7 @@
             <p14:sldId id="268"/>
           </p14:sldIdLst>
         </p14:section>
-        <p14:section name="Routes" id="{9099cbf0-b7a9-3e69-9107-23220cbefe17}">
+        <p14:section name="Routes" id="{14c8d808-31c7-ef7b-a716-3a3ddbc1fe3f}">
           <p14:sldIdLst>
             <p14:sldId id="269"/>
             <p14:sldId id="270"/>
@@ -168,12 +168,12 @@
             <p14:sldId id="272"/>
           </p14:sldIdLst>
         </p14:section>
-        <p14:section name="Close" id="{b686af3d-176c-7174-5a8b-48091fe589a0}">
+        <p14:section name="Close" id="{9163b357-51f9-1c92-ebb5-6ed00c680a0c}">
           <p14:sldIdLst>
             <p14:sldId id="273"/>
           </p14:sldIdLst>
         </p14:section>
-        <p14:section name="Answers" id="{d5af865f-484c-b436-2638-3d90311786d6}">
+        <p14:section name="Answers" id="{cc3bb46d-940f-d575-240f-bec403aad984}">
           <p14:sldIdLst>
             <p14:sldId id="274"/>
             <p14:sldId id="275"/>
